--- a/decks/triple-electromagnetism/triple-electromagnetism_ch3_motor-effect.pptx
+++ b/decks/triple-electromagnetism/triple-electromagnetism_ch3_motor-effect.pptx
@@ -124,29 +124,29 @@
   <p:extLst>
     <p:ext uri="{521415D9-36F7-43E2-AB2F-B90AF26B5E84}">
       <p14:sectionLst xmlns:p14="http://schemas.microsoft.com/office/powerpoint/2010/main">
-        <p14:section name="Opening" id="{7fbc8411-4e8d-62ad-5925-2a1a8c318a5d}">
+        <p14:section name="Opening" id="{9cb9c273-8b8e-9846-fd8a-719fbe08a52f}">
           <p14:sldIdLst>
             <p14:sldId id="256"/>
           </p14:sldIdLst>
         </p14:section>
-        <p14:section name="Gate" id="{a86ab0da-160a-a2ba-7555-b40f9e032c17}">
+        <p14:section name="Gate" id="{0782a079-6b7a-6631-35c2-cb6b58633db7}">
           <p14:sldIdLst>
             <p14:sldId id="257"/>
             <p14:sldId id="258"/>
           </p14:sldIdLst>
         </p14:section>
-        <p14:section name="Pre-teach" id="{d6795239-be29-f561-3016-e288eeec0add}">
+        <p14:section name="Pre-teach" id="{50247005-1953-0fdc-064e-5c4c5f48d523}">
           <p14:sldIdLst>
             <p14:sldId id="259"/>
           </p14:sldIdLst>
         </p14:section>
-        <p14:section name="Read-along" id="{3954172e-f48a-2409-7ec9-457e8817286a}">
+        <p14:section name="Read-along" id="{b3ae6556-9253-ff7a-0bcc-cced8c2d1a87}">
           <p14:sldIdLst>
             <p14:sldId id="260"/>
             <p14:sldId id="261"/>
           </p14:sldIdLst>
         </p14:section>
-        <p14:section name="Teach" id="{25f40ce3-3561-9584-6bfe-7e076e323dab}">
+        <p14:section name="Teach" id="{adac6b5c-cc79-ea20-0073-4667e3631ce6}">
           <p14:sldIdLst>
             <p14:sldId id="262"/>
             <p14:sldId id="263"/>
@@ -155,19 +155,19 @@
             <p14:sldId id="266"/>
           </p14:sldIdLst>
         </p14:section>
-        <p14:section name="Routes" id="{122eae74-69bc-3c6e-87a6-a90c0f0b9301}">
+        <p14:section name="Routes" id="{44931d18-7e2c-2e8f-8956-a7666db39f0c}">
           <p14:sldIdLst>
             <p14:sldId id="267"/>
             <p14:sldId id="268"/>
             <p14:sldId id="269"/>
           </p14:sldIdLst>
         </p14:section>
-        <p14:section name="Close" id="{3181917a-4ad7-968c-5c3f-13217e473590}">
+        <p14:section name="Close" id="{ce1f0a11-3228-c823-f660-0363df315eb7}">
           <p14:sldIdLst>
             <p14:sldId id="270"/>
           </p14:sldIdLst>
         </p14:section>
-        <p14:section name="Answers" id="{ec3ded23-4cda-a87e-556e-ec34aca879df}">
+        <p14:section name="Answers" id="{3e7a5355-c3e6-a868-3fa0-086d62151d41}">
           <p14:sldIdLst>
             <p14:sldId id="271"/>
             <p14:sldId id="272"/>
@@ -1228,7 +1228,7 @@
             <a:r>
               <a:rPr lang="en-US" dirty="0"/>
               <a:t>Answers — task 1: Which way does it move?. Reveal the answer; pupils mark their own work in a different colour, then read the "why" together. Same destination for every lane, so one answer serves the whole class.
-Answer: A   Upwards
+Answer: D   Upwards
 Why: Left-hand rule: first finger along the field (left to right), second finger along the conventional current (towards you), and the thumb points upwards. Reversing the current or the field would make it downwards.
 Ask a Support pupil to explain one step, and a Stretch pupil to share their extension.</a:t>
             </a:r>
@@ -1501,7 +1501,7 @@
             <a:r>
               <a:rPr lang="en-US" dirty="0"/>
               <a:t>Do now — retrieval. Silent, no notes, no help: recall comes before any support. Give about four minutes.
-1. In Fleming's left-hand rule, what does the thumb represent?  →  A   The force (direction of motion)
+1. In Fleming's left-hand rule, what does the thumb represent?  →  D   The force (direction of motion)
 2. A wire of length 0.5 m carries a current of 3 A at right angles to a magnetic field of flux density 0.2 T. Calculate the force on the wire in newtons.  →  0.3 N
 3. The force on a current-carrying wire is at its maximum when the current is ___ to the magnetic field.  →  perpendicular
 Circulate: who gets 3/3 (Stretch route), 2/3 (Core), 0–1 (Support)? Use this to route pupils later in the lesson.</a:t>
@@ -1593,7 +1593,7 @@
             <a:r>
               <a:rPr lang="en-US" dirty="0"/>
               <a:t>Answers — pupils mark their own in a different colour, then hands up for 3/3, 2/3, 1/3.
-1. A   The force (direction of motion). Thumb: force or motion. First finger: field (N to S). Second finger: conventional current.
+1. D   The force (direction of motion). Thumb: force or motion. First finger: field (N to S). Second finger: conventional current.
 2. 0.3 N. F = B I l = 0.2 × 3 × 0.5 = 0.3 N. Exact from the data (1 s.f. data gives 0.3).
 3. perpendicular. At right angles (perpendicular) the force is biggest; parallel to the field there is no force at all.
 Say the route each score points to: 3/3 Stretch, 2/3 Core, 0–1 Support. Pupils may choose to move up.</a:t>
@@ -6047,7 +6047,7 @@
                 <a:ea typeface="Calibri" pitchFamily="34" charset="-122"/>
                 <a:cs typeface="Calibri" pitchFamily="34" charset="-120"/>
               </a:rPr>
-              <a:t>Upwards</a:t>
+              <a:t>Out of the page, towards you</a:t>
             </a:r>
             <a:endParaRPr lang="en-US" sz="2600" dirty="0"/>
           </a:p>
@@ -6158,7 +6158,7 @@
                 <a:ea typeface="Calibri" pitchFamily="34" charset="-122"/>
                 <a:cs typeface="Calibri" pitchFamily="34" charset="-120"/>
               </a:rPr>
-              <a:t>Out of the page, towards you</a:t>
+              <a:t>Upwards</a:t>
             </a:r>
             <a:endParaRPr lang="en-US" sz="2600" dirty="0"/>
           </a:p>
@@ -8986,7 +8986,7 @@
                 <a:ea typeface="Cambria" pitchFamily="34" charset="-122"/>
                 <a:cs typeface="Cambria" pitchFamily="34" charset="-120"/>
               </a:rPr>
-              <a:t>A   Upwards</a:t>
+              <a:t>D   Upwards</a:t>
             </a:r>
             <a:endParaRPr lang="en-US" sz="1800" dirty="0"/>
           </a:p>
@@ -10438,7 +10438,7 @@
                 <a:ea typeface="Calibri" pitchFamily="34" charset="-122"/>
                 <a:cs typeface="Calibri" pitchFamily="34" charset="-120"/>
               </a:rPr>
-              <a:t>The force (direction of motion)</a:t>
+              <a:t>The north pole</a:t>
             </a:r>
             <a:endParaRPr lang="en-US" sz="2400" dirty="0"/>
           </a:p>
@@ -10475,7 +10475,7 @@
                 <a:ea typeface="Calibri" pitchFamily="34" charset="-122"/>
                 <a:cs typeface="Calibri" pitchFamily="34" charset="-120"/>
               </a:rPr>
-              <a:t>The magnetic field</a:t>
+              <a:t>The current</a:t>
             </a:r>
             <a:endParaRPr lang="en-US" sz="2400" dirty="0"/>
           </a:p>
@@ -10512,7 +10512,7 @@
                 <a:ea typeface="Calibri" pitchFamily="34" charset="-122"/>
                 <a:cs typeface="Calibri" pitchFamily="34" charset="-120"/>
               </a:rPr>
-              <a:t>The current</a:t>
+              <a:t>The magnetic field</a:t>
             </a:r>
             <a:endParaRPr lang="en-US" sz="2400" dirty="0"/>
           </a:p>
@@ -10549,7 +10549,7 @@
                 <a:ea typeface="Calibri" pitchFamily="34" charset="-122"/>
                 <a:cs typeface="Calibri" pitchFamily="34" charset="-120"/>
               </a:rPr>
-              <a:t>The north pole</a:t>
+              <a:t>The force (direction of motion)</a:t>
             </a:r>
             <a:endParaRPr lang="en-US" sz="2400" dirty="0"/>
           </a:p>
@@ -11346,7 +11346,7 @@
                 <a:ea typeface="Calibri" pitchFamily="34" charset="-122"/>
                 <a:cs typeface="Calibri" pitchFamily="34" charset="-120"/>
               </a:rPr>
-              <a:t>A   The force (direction of motion)</a:t>
+              <a:t>D   The force (direction of motion)</a:t>
             </a:r>
             <a:endParaRPr lang="en-US" sz="2200" dirty="0"/>
           </a:p>

--- a/decks/triple-electromagnetism/triple-electromagnetism_ch3_motor-effect.pptx
+++ b/decks/triple-electromagnetism/triple-electromagnetism_ch3_motor-effect.pptx
@@ -124,29 +124,29 @@
   <p:extLst>
     <p:ext uri="{521415D9-36F7-43E2-AB2F-B90AF26B5E84}">
       <p14:sectionLst xmlns:p14="http://schemas.microsoft.com/office/powerpoint/2010/main">
-        <p14:section name="Opening" id="{9cb9c273-8b8e-9846-fd8a-719fbe08a52f}">
+        <p14:section name="Opening" id="{7912dbfa-782b-908e-fcb6-f23b8d653ea7}">
           <p14:sldIdLst>
             <p14:sldId id="256"/>
           </p14:sldIdLst>
         </p14:section>
-        <p14:section name="Gate" id="{0782a079-6b7a-6631-35c2-cb6b58633db7}">
+        <p14:section name="Gate" id="{949901f0-1704-cb20-083e-c5a273ec59e3}">
           <p14:sldIdLst>
             <p14:sldId id="257"/>
             <p14:sldId id="258"/>
           </p14:sldIdLst>
         </p14:section>
-        <p14:section name="Pre-teach" id="{50247005-1953-0fdc-064e-5c4c5f48d523}">
+        <p14:section name="Pre-teach" id="{9dcec448-41a0-9eff-75d0-7c1741f7ac6d}">
           <p14:sldIdLst>
             <p14:sldId id="259"/>
           </p14:sldIdLst>
         </p14:section>
-        <p14:section name="Read-along" id="{b3ae6556-9253-ff7a-0bcc-cced8c2d1a87}">
+        <p14:section name="Read-along" id="{829b768d-a774-7cdd-a12c-4f5dad8d1612}">
           <p14:sldIdLst>
             <p14:sldId id="260"/>
             <p14:sldId id="261"/>
           </p14:sldIdLst>
         </p14:section>
-        <p14:section name="Teach" id="{adac6b5c-cc79-ea20-0073-4667e3631ce6}">
+        <p14:section name="Teach" id="{f98f72cf-f62a-9fcb-8725-2b2dcf9b68cd}">
           <p14:sldIdLst>
             <p14:sldId id="262"/>
             <p14:sldId id="263"/>
@@ -155,19 +155,19 @@
             <p14:sldId id="266"/>
           </p14:sldIdLst>
         </p14:section>
-        <p14:section name="Routes" id="{44931d18-7e2c-2e8f-8956-a7666db39f0c}">
+        <p14:section name="Routes" id="{0febf7da-19f1-e827-ceb4-57dc61d473ea}">
           <p14:sldIdLst>
             <p14:sldId id="267"/>
             <p14:sldId id="268"/>
             <p14:sldId id="269"/>
           </p14:sldIdLst>
         </p14:section>
-        <p14:section name="Close" id="{ce1f0a11-3228-c823-f660-0363df315eb7}">
+        <p14:section name="Close" id="{5bbbea21-ebe9-a856-99c9-a1abefec3441}">
           <p14:sldIdLst>
             <p14:sldId id="270"/>
           </p14:sldIdLst>
         </p14:section>
-        <p14:section name="Answers" id="{3e7a5355-c3e6-a868-3fa0-086d62151d41}">
+        <p14:section name="Answers" id="{c60914af-b598-f597-e733-a8201de2312f}">
           <p14:sldIdLst>
             <p14:sldId id="271"/>
             <p14:sldId id="272"/>
